--- a/Files/Agripal.pptx
+++ b/Files/Agripal.pptx
@@ -117,6 +117,11 @@
       </a:defRPr>
     </a:lvl9pPr>
   </p:defaultTextStyle>
+  <p:extLst>
+    <p:ext uri="{EFAFB233-063F-42B5-8137-9DF3F51BA10A}">
+      <p15:sldGuideLst xmlns:p15="http://schemas.microsoft.com/office/powerpoint/2012/main"/>
+    </p:ext>
+  </p:extLst>
 </p:presentation>
 </file>
 
@@ -622,7 +627,7 @@
           <a:p>
             <a:fld id="{7975CF5E-BCCF-46AF-A3E8-A02DDC243416}" type="datetimeFigureOut">
               <a:rPr lang="en-ZM" smtClean="0"/>
-              <a:t>16/03/2026</a:t>
+              <a:t>19/03/2026</a:t>
             </a:fld>
             <a:endParaRPr lang="en-ZM"/>
           </a:p>
@@ -918,7 +923,7 @@
           <a:p>
             <a:fld id="{7975CF5E-BCCF-46AF-A3E8-A02DDC243416}" type="datetimeFigureOut">
               <a:rPr lang="en-ZM" smtClean="0"/>
-              <a:t>16/03/2026</a:t>
+              <a:t>19/03/2026</a:t>
             </a:fld>
             <a:endParaRPr lang="en-ZM"/>
           </a:p>
@@ -1166,7 +1171,7 @@
           <a:p>
             <a:fld id="{7975CF5E-BCCF-46AF-A3E8-A02DDC243416}" type="datetimeFigureOut">
               <a:rPr lang="en-ZM" smtClean="0"/>
-              <a:t>16/03/2026</a:t>
+              <a:t>19/03/2026</a:t>
             </a:fld>
             <a:endParaRPr lang="en-ZM"/>
           </a:p>
@@ -1706,7 +1711,7 @@
           <a:p>
             <a:fld id="{7975CF5E-BCCF-46AF-A3E8-A02DDC243416}" type="datetimeFigureOut">
               <a:rPr lang="en-ZM" smtClean="0"/>
-              <a:t>16/03/2026</a:t>
+              <a:t>19/03/2026</a:t>
             </a:fld>
             <a:endParaRPr lang="en-ZM"/>
           </a:p>
@@ -1954,7 +1959,7 @@
           <a:p>
             <a:fld id="{7975CF5E-BCCF-46AF-A3E8-A02DDC243416}" type="datetimeFigureOut">
               <a:rPr lang="en-ZM" smtClean="0"/>
-              <a:t>16/03/2026</a:t>
+              <a:t>19/03/2026</a:t>
             </a:fld>
             <a:endParaRPr lang="en-ZM"/>
           </a:p>
@@ -2486,7 +2491,7 @@
           <a:p>
             <a:fld id="{7975CF5E-BCCF-46AF-A3E8-A02DDC243416}" type="datetimeFigureOut">
               <a:rPr lang="en-ZM" smtClean="0"/>
-              <a:t>16/03/2026</a:t>
+              <a:t>19/03/2026</a:t>
             </a:fld>
             <a:endParaRPr lang="en-ZM"/>
           </a:p>
@@ -2783,7 +2788,7 @@
           <a:p>
             <a:fld id="{7975CF5E-BCCF-46AF-A3E8-A02DDC243416}" type="datetimeFigureOut">
               <a:rPr lang="en-ZM" smtClean="0"/>
-              <a:t>16/03/2026</a:t>
+              <a:t>19/03/2026</a:t>
             </a:fld>
             <a:endParaRPr lang="en-ZM"/>
           </a:p>
@@ -2957,7 +2962,7 @@
           <a:p>
             <a:fld id="{7975CF5E-BCCF-46AF-A3E8-A02DDC243416}" type="datetimeFigureOut">
               <a:rPr lang="en-ZM" smtClean="0"/>
-              <a:t>16/03/2026</a:t>
+              <a:t>19/03/2026</a:t>
             </a:fld>
             <a:endParaRPr lang="en-ZM"/>
           </a:p>
@@ -3137,7 +3142,7 @@
           <a:p>
             <a:fld id="{7975CF5E-BCCF-46AF-A3E8-A02DDC243416}" type="datetimeFigureOut">
               <a:rPr lang="en-ZM" smtClean="0"/>
-              <a:t>16/03/2026</a:t>
+              <a:t>19/03/2026</a:t>
             </a:fld>
             <a:endParaRPr lang="en-ZM"/>
           </a:p>
@@ -3307,7 +3312,7 @@
           <a:p>
             <a:fld id="{7975CF5E-BCCF-46AF-A3E8-A02DDC243416}" type="datetimeFigureOut">
               <a:rPr lang="en-ZM" smtClean="0"/>
-              <a:t>16/03/2026</a:t>
+              <a:t>19/03/2026</a:t>
             </a:fld>
             <a:endParaRPr lang="en-ZM"/>
           </a:p>
@@ -3558,7 +3563,7 @@
           <a:p>
             <a:fld id="{7975CF5E-BCCF-46AF-A3E8-A02DDC243416}" type="datetimeFigureOut">
               <a:rPr lang="en-ZM" smtClean="0"/>
-              <a:t>16/03/2026</a:t>
+              <a:t>19/03/2026</a:t>
             </a:fld>
             <a:endParaRPr lang="en-ZM"/>
           </a:p>
@@ -3855,7 +3860,7 @@
           <a:p>
             <a:fld id="{7975CF5E-BCCF-46AF-A3E8-A02DDC243416}" type="datetimeFigureOut">
               <a:rPr lang="en-ZM" smtClean="0"/>
-              <a:t>16/03/2026</a:t>
+              <a:t>19/03/2026</a:t>
             </a:fld>
             <a:endParaRPr lang="en-ZM"/>
           </a:p>
@@ -4297,7 +4302,7 @@
           <a:p>
             <a:fld id="{7975CF5E-BCCF-46AF-A3E8-A02DDC243416}" type="datetimeFigureOut">
               <a:rPr lang="en-ZM" smtClean="0"/>
-              <a:t>16/03/2026</a:t>
+              <a:t>19/03/2026</a:t>
             </a:fld>
             <a:endParaRPr lang="en-ZM"/>
           </a:p>
@@ -4415,7 +4420,7 @@
           <a:p>
             <a:fld id="{7975CF5E-BCCF-46AF-A3E8-A02DDC243416}" type="datetimeFigureOut">
               <a:rPr lang="en-ZM" smtClean="0"/>
-              <a:t>16/03/2026</a:t>
+              <a:t>19/03/2026</a:t>
             </a:fld>
             <a:endParaRPr lang="en-ZM"/>
           </a:p>
@@ -4510,7 +4515,7 @@
           <a:p>
             <a:fld id="{7975CF5E-BCCF-46AF-A3E8-A02DDC243416}" type="datetimeFigureOut">
               <a:rPr lang="en-ZM" smtClean="0"/>
-              <a:t>16/03/2026</a:t>
+              <a:t>19/03/2026</a:t>
             </a:fld>
             <a:endParaRPr lang="en-ZM"/>
           </a:p>
@@ -4793,7 +4798,7 @@
           <a:p>
             <a:fld id="{7975CF5E-BCCF-46AF-A3E8-A02DDC243416}" type="datetimeFigureOut">
               <a:rPr lang="en-ZM" smtClean="0"/>
-              <a:t>16/03/2026</a:t>
+              <a:t>19/03/2026</a:t>
             </a:fld>
             <a:endParaRPr lang="en-ZM"/>
           </a:p>
@@ -5084,7 +5089,7 @@
           <a:p>
             <a:fld id="{7975CF5E-BCCF-46AF-A3E8-A02DDC243416}" type="datetimeFigureOut">
               <a:rPr lang="en-ZM" smtClean="0"/>
-              <a:t>16/03/2026</a:t>
+              <a:t>19/03/2026</a:t>
             </a:fld>
             <a:endParaRPr lang="en-ZM"/>
           </a:p>
@@ -5614,7 +5619,7 @@
           <a:p>
             <a:fld id="{7975CF5E-BCCF-46AF-A3E8-A02DDC243416}" type="datetimeFigureOut">
               <a:rPr lang="en-ZM" smtClean="0"/>
-              <a:t>16/03/2026</a:t>
+              <a:t>19/03/2026</a:t>
             </a:fld>
             <a:endParaRPr lang="en-ZM"/>
           </a:p>
@@ -6931,7 +6936,15 @@
             </a:pPr>
             <a:r>
               <a:rPr lang="en-US" dirty="0"/>
-              <a:t>(AI ) Developer. I am familiar with Python, Java, SQL, Django, HTML5 and CSS. I play chess, participate in challenges on </a:t>
+              <a:t>(AI ) Developer. I am familiar with Python, Java, SQL, Django, HTML5 and CSS, Git and </a:t>
+            </a:r>
+            <a:r>
+              <a:rPr lang="en-US"/>
+              <a:t>Github. </a:t>
+            </a:r>
+            <a:r>
+              <a:rPr lang="en-US" dirty="0"/>
+              <a:t>I play chess, participate in challenges on </a:t>
             </a:r>
             <a:r>
               <a:rPr lang="en-US" dirty="0" err="1"/>
